--- a/presentation.pptx
+++ b/presentation.pptx
@@ -3728,7 +3728,7 @@
                   <a:srgbClr val="1A233A"/>
                 </a:solidFill>
               </a:rPr>
-              <a:t>Scalability — honest assessment</a:t>
+              <a:t>Scalability — assessment</a:t>
             </a:r>
           </a:p>
         </p:txBody>
@@ -7423,7 +7423,7 @@
                   <a:srgbClr val="FFFFFF"/>
                 </a:solidFill>
               </a:rPr>
-              <a:t>Pillar 1: Impact Forecasting — Honest Model Results</a:t>
+              <a:t>Pillar 1: Impact Forecasting — Model Results</a:t>
             </a:r>
           </a:p>
           <a:p>
@@ -7618,7 +7618,7 @@
                   <a:srgbClr val="1A233A"/>
                 </a:solidFill>
               </a:rPr>
-              <a:t>Duration benchmark  —  honest planning uncertainty</a:t>
+              <a:t>Duration benchmark  —  planning uncertainty</a:t>
             </a:r>
           </a:p>
           <a:p>

--- a/presentation.pptx
+++ b/presentation.pptx
@@ -3315,7 +3315,7 @@
                   <a:srgbClr val="D0DCEA"/>
                 </a:solidFill>
               </a:rPr>
-              <a:t>▸  Live prototype:  Streamlit dashboard  +  real-time Event Simulator</a:t>
+              <a:t>▸  Live prototype:  Streamlit dashboard  —  Event Response + City Insights</a:t>
             </a:r>
           </a:p>
           <a:p>
@@ -3629,7 +3629,7 @@
                   <a:srgbClr val="1A233A"/>
                 </a:solidFill>
               </a:rPr>
-              <a:t>▸  Closure-risk events (Mysore Road construction 62%) trigger barricade pre-staging</a:t>
+              <a:t>▸  Closure-risk events (Mysore Road construction 68%) trigger barricade pre-staging</a:t>
             </a:r>
           </a:p>
         </p:txBody>
@@ -4837,7 +4837,7 @@
                   <a:srgbClr val="FFFFFF"/>
                 </a:solidFill>
               </a:rPr>
-              <a:t>The Ask</a:t>
+              <a:t>Roadmap to Production</a:t>
             </a:r>
           </a:p>
           <a:p>
@@ -4848,7 +4848,7 @@
                   <a:srgbClr val="B8C5D6"/>
                 </a:solidFill>
               </a:rPr>
-              <a:t>One prototype ready now.  Three things needed to make it operational.</a:t>
+              <a:t>Built and working today — a clear path from prototype to daily BTP use.</a:t>
             </a:r>
           </a:p>
         </p:txBody>
@@ -4977,7 +4977,7 @@
                   <a:srgbClr val="1A233A"/>
                 </a:solidFill>
               </a:rPr>
-              <a:t>▸  Streamlit dashboard with live Event Simulator — inference under 1 second per event</a:t>
+              <a:t>▸  Streamlit dashboard — Event Response + City Insights, inference under 1 second per event</a:t>
             </a:r>
           </a:p>
           <a:p>
@@ -5386,7 +5386,7 @@
                   <a:srgbClr val="FF6B00"/>
                 </a:solidFill>
               </a:rPr>
-              <a:t>Flipkart ask: infrastructure + deployment support for the Streamlit dashboard on BTP's internal network</a:t>
+              <a:t>Already live on Streamlit Cloud and fully reproducible — deployable on BTP's internal network today</a:t>
             </a:r>
           </a:p>
         </p:txBody>
@@ -7311,7 +7311,7 @@
                   <a:srgbClr val="FF6B00"/>
                 </a:solidFill>
               </a:rPr>
-              <a:t>Streamlit dashboard: live map · hotspot heatmap · trend charts · Event Simulator (live demo at the finale)</a:t>
+              <a:t>Streamlit dashboard: Event Response + City Insights (map · hotspots · corridors)  —  live demo at the finale</a:t>
             </a:r>
           </a:p>
         </p:txBody>
@@ -7645,7 +7645,7 @@
       </p:sp>
       <p:pic>
         <p:nvPicPr>
-          <p:cNvPr id="6" name="Picture 5" descr="fig_07_learning.png"/>
+          <p:cNvPr id="6" name="Picture 5" descr="fig_05_resolution_by_cause.png"/>
           <p:cNvPicPr>
             <a:picLocks noChangeAspect="1"/>
           </p:cNvPicPr>
@@ -7659,14 +7659,47 @@
         </p:blipFill>
         <p:spPr>
           <a:xfrm>
-            <a:off x="7680960" y="1417320"/>
-            <a:ext cx="4206240" cy="5120640"/>
+            <a:off x="7635240" y="2743200"/>
+            <a:ext cx="4343400" cy="2185416"/>
           </a:xfrm>
           <a:prstGeom prst="rect">
             <a:avLst/>
           </a:prstGeom>
         </p:spPr>
       </p:pic>
+      <p:sp>
+        <p:nvSpPr>
+          <p:cNvPr id="7" name="TextBox 6"/>
+          <p:cNvSpPr txBox="1"/>
+          <p:nvPr/>
+        </p:nvSpPr>
+        <p:spPr>
+          <a:xfrm>
+            <a:off x="7635240" y="5029200"/>
+            <a:ext cx="4343400" cy="640080"/>
+          </a:xfrm>
+          <a:prstGeom prst="rect">
+            <a:avLst/>
+          </a:prstGeom>
+          <a:noFill/>
+        </p:spPr>
+        <p:txBody>
+          <a:bodyPr wrap="square">
+            <a:spAutoFit/>
+          </a:bodyPr>
+          <a:lstStyle/>
+          <a:p>
+            <a:r>
+              <a:rPr sz="1100" i="1">
+                <a:solidFill>
+                  <a:srgbClr val="55657A"/>
+                </a:solidFill>
+              </a:rPr>
+              <a:t>Clearance time by cause — construction &amp; road_conditions are the &gt;2 h bottlenecks</a:t>
+            </a:r>
+          </a:p>
+        </p:txBody>
+      </p:sp>
     </p:spTree>
   </p:cSld>
   <p:clrMapOvr>
@@ -8036,7 +8069,7 @@
                   <a:srgbClr val="FF6B00"/>
                 </a:solidFill>
               </a:rPr>
-              <a:t>62%</a:t>
+              <a:t>68%</a:t>
             </a:r>
           </a:p>
         </p:txBody>
@@ -8234,7 +8267,7 @@
                   <a:srgbClr val="FF6B00"/>
                 </a:solidFill>
               </a:rPr>
-              <a:t>YES  (62% &gt; 35% threshold = 4× the historical base rate)</a:t>
+              <a:t>YES  (68% &gt; 35% threshold = 4× the historical base rate)</a:t>
             </a:r>
           </a:p>
         </p:txBody>
@@ -8599,7 +8632,7 @@
         <p:spPr>
           <a:xfrm>
             <a:off x="365760" y="1481328"/>
-            <a:ext cx="2468880" cy="347472"/>
+            <a:ext cx="1325880" cy="347472"/>
           </a:xfrm>
           <a:prstGeom prst="rect">
             <a:avLst/>
@@ -8642,7 +8675,7 @@
         <p:spPr>
           <a:xfrm>
             <a:off x="411480" y="1508760"/>
-            <a:ext cx="2377440" cy="292608"/>
+            <a:ext cx="1234440" cy="292608"/>
           </a:xfrm>
           <a:prstGeom prst="rect">
             <a:avLst/>
@@ -8657,7 +8690,7 @@
           <a:p>
             <a:pPr algn="ctr"/>
             <a:r>
-              <a:rPr sz="1400" b="1">
+              <a:rPr sz="1300" b="1">
                 <a:solidFill>
                   <a:srgbClr val="FFFFFF"/>
                 </a:solidFill>
@@ -8675,8 +8708,8 @@
         </p:nvSpPr>
         <p:spPr>
           <a:xfrm>
-            <a:off x="2926080" y="1481328"/>
-            <a:ext cx="3291840" cy="347472"/>
+            <a:off x="1737360" y="1481328"/>
+            <a:ext cx="1737360" cy="347472"/>
           </a:xfrm>
           <a:prstGeom prst="rect">
             <a:avLst/>
@@ -8718,8 +8751,8 @@
         </p:nvSpPr>
         <p:spPr>
           <a:xfrm>
-            <a:off x="2971800" y="1508760"/>
-            <a:ext cx="3200400" cy="292608"/>
+            <a:off x="1783080" y="1508760"/>
+            <a:ext cx="1645920" cy="292608"/>
           </a:xfrm>
           <a:prstGeom prst="rect">
             <a:avLst/>
@@ -8734,12 +8767,12 @@
           <a:p>
             <a:pPr algn="ctr"/>
             <a:r>
-              <a:rPr sz="1400" b="1">
+              <a:rPr sz="1300" b="1">
                 <a:solidFill>
                   <a:srgbClr val="FFFFFF"/>
                 </a:solidFill>
               </a:rPr>
-              <a:t>Static (frozen) AUC</a:t>
+              <a:t>Static (frozen)</a:t>
             </a:r>
           </a:p>
         </p:txBody>
@@ -8752,8 +8785,8 @@
         </p:nvSpPr>
         <p:spPr>
           <a:xfrm>
-            <a:off x="6400800" y="1481328"/>
-            <a:ext cx="2743200" cy="347472"/>
+            <a:off x="3520440" y="1481328"/>
+            <a:ext cx="1783080" cy="347472"/>
           </a:xfrm>
           <a:prstGeom prst="rect">
             <a:avLst/>
@@ -8795,8 +8828,8 @@
         </p:nvSpPr>
         <p:spPr>
           <a:xfrm>
-            <a:off x="6446520" y="1508760"/>
-            <a:ext cx="2651760" cy="292608"/>
+            <a:off x="3566160" y="1508760"/>
+            <a:ext cx="1691640" cy="292608"/>
           </a:xfrm>
           <a:prstGeom prst="rect">
             <a:avLst/>
@@ -8811,12 +8844,12 @@
           <a:p>
             <a:pPr algn="ctr"/>
             <a:r>
-              <a:rPr sz="1400" b="1">
+              <a:rPr sz="1300" b="1">
                 <a:solidFill>
                   <a:srgbClr val="FFFFFF"/>
                 </a:solidFill>
               </a:rPr>
-              <a:t>Retrained AUC</a:t>
+              <a:t>Retrained</a:t>
             </a:r>
           </a:p>
         </p:txBody>
@@ -8829,8 +8862,8 @@
         </p:nvSpPr>
         <p:spPr>
           <a:xfrm>
-            <a:off x="9326880" y="1481328"/>
-            <a:ext cx="2560320" cy="347472"/>
+            <a:off x="5349240" y="1481328"/>
+            <a:ext cx="1417320" cy="347472"/>
           </a:xfrm>
           <a:prstGeom prst="rect">
             <a:avLst/>
@@ -8872,8 +8905,8 @@
         </p:nvSpPr>
         <p:spPr>
           <a:xfrm>
-            <a:off x="9372600" y="1508760"/>
-            <a:ext cx="2468880" cy="292608"/>
+            <a:off x="5394960" y="1508760"/>
+            <a:ext cx="1325880" cy="292608"/>
           </a:xfrm>
           <a:prstGeom prst="rect">
             <a:avLst/>
@@ -8888,7 +8921,7 @@
           <a:p>
             <a:pPr algn="ctr"/>
             <a:r>
-              <a:rPr sz="1400" b="1">
+              <a:rPr sz="1300" b="1">
                 <a:solidFill>
                   <a:srgbClr val="FFFFFF"/>
                 </a:solidFill>
@@ -8907,7 +8940,7 @@
         <p:spPr>
           <a:xfrm>
             <a:off x="365760" y="1874519"/>
-            <a:ext cx="2468880" cy="429768"/>
+            <a:ext cx="1325880" cy="429768"/>
           </a:xfrm>
           <a:prstGeom prst="rect">
             <a:avLst/>
@@ -8950,7 +8983,7 @@
         <p:spPr>
           <a:xfrm>
             <a:off x="411480" y="1911095"/>
-            <a:ext cx="2377440" cy="347472"/>
+            <a:ext cx="1234440" cy="347472"/>
           </a:xfrm>
           <a:prstGeom prst="rect">
             <a:avLst/>
@@ -8983,8 +9016,8 @@
         </p:nvSpPr>
         <p:spPr>
           <a:xfrm>
-            <a:off x="2926080" y="1874519"/>
-            <a:ext cx="3291840" cy="429768"/>
+            <a:off x="1737360" y="1874519"/>
+            <a:ext cx="1737360" cy="429768"/>
           </a:xfrm>
           <a:prstGeom prst="rect">
             <a:avLst/>
@@ -9026,8 +9059,8 @@
         </p:nvSpPr>
         <p:spPr>
           <a:xfrm>
-            <a:off x="2971800" y="1911095"/>
-            <a:ext cx="3200400" cy="347472"/>
+            <a:off x="1783080" y="1911095"/>
+            <a:ext cx="1645920" cy="347472"/>
           </a:xfrm>
           <a:prstGeom prst="rect">
             <a:avLst/>
@@ -9060,8 +9093,8 @@
         </p:nvSpPr>
         <p:spPr>
           <a:xfrm>
-            <a:off x="6400800" y="1874519"/>
-            <a:ext cx="2743200" cy="429768"/>
+            <a:off x="3520440" y="1874519"/>
+            <a:ext cx="1783080" cy="429768"/>
           </a:xfrm>
           <a:prstGeom prst="rect">
             <a:avLst/>
@@ -9103,8 +9136,8 @@
         </p:nvSpPr>
         <p:spPr>
           <a:xfrm>
-            <a:off x="6446520" y="1911095"/>
-            <a:ext cx="2651760" cy="347472"/>
+            <a:off x="3566160" y="1911095"/>
+            <a:ext cx="1691640" cy="347472"/>
           </a:xfrm>
           <a:prstGeom prst="rect">
             <a:avLst/>
@@ -9137,8 +9170,8 @@
         </p:nvSpPr>
         <p:spPr>
           <a:xfrm>
-            <a:off x="9326880" y="1874519"/>
-            <a:ext cx="2560320" cy="429768"/>
+            <a:off x="5349240" y="1874519"/>
+            <a:ext cx="1417320" cy="429768"/>
           </a:xfrm>
           <a:prstGeom prst="rect">
             <a:avLst/>
@@ -9180,8 +9213,8 @@
         </p:nvSpPr>
         <p:spPr>
           <a:xfrm>
-            <a:off x="9372600" y="1911095"/>
-            <a:ext cx="2468880" cy="347472"/>
+            <a:off x="5394960" y="1911095"/>
+            <a:ext cx="1325880" cy="347472"/>
           </a:xfrm>
           <a:prstGeom prst="rect">
             <a:avLst/>
@@ -9215,7 +9248,7 @@
         <p:spPr>
           <a:xfrm>
             <a:off x="365760" y="2350008"/>
-            <a:ext cx="2468880" cy="429768"/>
+            <a:ext cx="1325880" cy="429768"/>
           </a:xfrm>
           <a:prstGeom prst="rect">
             <a:avLst/>
@@ -9258,7 +9291,7 @@
         <p:spPr>
           <a:xfrm>
             <a:off x="411480" y="2386584"/>
-            <a:ext cx="2377440" cy="347472"/>
+            <a:ext cx="1234440" cy="347472"/>
           </a:xfrm>
           <a:prstGeom prst="rect">
             <a:avLst/>
@@ -9291,8 +9324,8 @@
         </p:nvSpPr>
         <p:spPr>
           <a:xfrm>
-            <a:off x="2926080" y="2350008"/>
-            <a:ext cx="3291840" cy="429768"/>
+            <a:off x="1737360" y="2350008"/>
+            <a:ext cx="1737360" cy="429768"/>
           </a:xfrm>
           <a:prstGeom prst="rect">
             <a:avLst/>
@@ -9334,8 +9367,8 @@
         </p:nvSpPr>
         <p:spPr>
           <a:xfrm>
-            <a:off x="2971800" y="2386584"/>
-            <a:ext cx="3200400" cy="347472"/>
+            <a:off x="1783080" y="2386584"/>
+            <a:ext cx="1645920" cy="347472"/>
           </a:xfrm>
           <a:prstGeom prst="rect">
             <a:avLst/>
@@ -9368,8 +9401,8 @@
         </p:nvSpPr>
         <p:spPr>
           <a:xfrm>
-            <a:off x="6400800" y="2350008"/>
-            <a:ext cx="2743200" cy="429768"/>
+            <a:off x="3520440" y="2350008"/>
+            <a:ext cx="1783080" cy="429768"/>
           </a:xfrm>
           <a:prstGeom prst="rect">
             <a:avLst/>
@@ -9411,8 +9444,8 @@
         </p:nvSpPr>
         <p:spPr>
           <a:xfrm>
-            <a:off x="6446520" y="2386584"/>
-            <a:ext cx="2651760" cy="347472"/>
+            <a:off x="3566160" y="2386584"/>
+            <a:ext cx="1691640" cy="347472"/>
           </a:xfrm>
           <a:prstGeom prst="rect">
             <a:avLst/>
@@ -9445,8 +9478,8 @@
         </p:nvSpPr>
         <p:spPr>
           <a:xfrm>
-            <a:off x="9326880" y="2350008"/>
-            <a:ext cx="2560320" cy="429768"/>
+            <a:off x="5349240" y="2350008"/>
+            <a:ext cx="1417320" cy="429768"/>
           </a:xfrm>
           <a:prstGeom prst="rect">
             <a:avLst/>
@@ -9488,8 +9521,8 @@
         </p:nvSpPr>
         <p:spPr>
           <a:xfrm>
-            <a:off x="9372600" y="2386584"/>
-            <a:ext cx="2468880" cy="347472"/>
+            <a:off x="5394960" y="2386584"/>
+            <a:ext cx="1325880" cy="347472"/>
           </a:xfrm>
           <a:prstGeom prst="rect">
             <a:avLst/>
@@ -9509,7 +9542,7 @@
                   <a:srgbClr val="FF6B00"/>
                 </a:solidFill>
               </a:rPr>
-              <a:t>+0.018  ← key failure</a:t>
+              <a:t>+0.018</a:t>
             </a:r>
           </a:p>
         </p:txBody>
@@ -9523,7 +9556,7 @@
         <p:spPr>
           <a:xfrm>
             <a:off x="365760" y="2825496"/>
-            <a:ext cx="2468880" cy="429768"/>
+            <a:ext cx="1325880" cy="429768"/>
           </a:xfrm>
           <a:prstGeom prst="rect">
             <a:avLst/>
@@ -9566,7 +9599,7 @@
         <p:spPr>
           <a:xfrm>
             <a:off x="411480" y="2862072"/>
-            <a:ext cx="2377440" cy="347472"/>
+            <a:ext cx="1234440" cy="347472"/>
           </a:xfrm>
           <a:prstGeom prst="rect">
             <a:avLst/>
@@ -9599,8 +9632,8 @@
         </p:nvSpPr>
         <p:spPr>
           <a:xfrm>
-            <a:off x="2926080" y="2825496"/>
-            <a:ext cx="3291840" cy="429768"/>
+            <a:off x="1737360" y="2825496"/>
+            <a:ext cx="1737360" cy="429768"/>
           </a:xfrm>
           <a:prstGeom prst="rect">
             <a:avLst/>
@@ -9642,8 +9675,8 @@
         </p:nvSpPr>
         <p:spPr>
           <a:xfrm>
-            <a:off x="2971800" y="2862072"/>
-            <a:ext cx="3200400" cy="347472"/>
+            <a:off x="1783080" y="2862072"/>
+            <a:ext cx="1645920" cy="347472"/>
           </a:xfrm>
           <a:prstGeom prst="rect">
             <a:avLst/>
@@ -9676,8 +9709,8 @@
         </p:nvSpPr>
         <p:spPr>
           <a:xfrm>
-            <a:off x="6400800" y="2825496"/>
-            <a:ext cx="2743200" cy="429768"/>
+            <a:off x="3520440" y="2825496"/>
+            <a:ext cx="1783080" cy="429768"/>
           </a:xfrm>
           <a:prstGeom prst="rect">
             <a:avLst/>
@@ -9719,8 +9752,8 @@
         </p:nvSpPr>
         <p:spPr>
           <a:xfrm>
-            <a:off x="6446520" y="2862072"/>
-            <a:ext cx="2651760" cy="347472"/>
+            <a:off x="3566160" y="2862072"/>
+            <a:ext cx="1691640" cy="347472"/>
           </a:xfrm>
           <a:prstGeom prst="rect">
             <a:avLst/>
@@ -9753,8 +9786,8 @@
         </p:nvSpPr>
         <p:spPr>
           <a:xfrm>
-            <a:off x="9326880" y="2825496"/>
-            <a:ext cx="2560320" cy="429768"/>
+            <a:off x="5349240" y="2825496"/>
+            <a:ext cx="1417320" cy="429768"/>
           </a:xfrm>
           <a:prstGeom prst="rect">
             <a:avLst/>
@@ -9796,8 +9829,8 @@
         </p:nvSpPr>
         <p:spPr>
           <a:xfrm>
-            <a:off x="9372600" y="2862072"/>
-            <a:ext cx="2468880" cy="347472"/>
+            <a:off x="5394960" y="2862072"/>
+            <a:ext cx="1325880" cy="347472"/>
           </a:xfrm>
           <a:prstGeom prst="rect">
             <a:avLst/>
@@ -9831,7 +9864,7 @@
         <p:spPr>
           <a:xfrm>
             <a:off x="365760" y="3300984"/>
-            <a:ext cx="2468880" cy="429768"/>
+            <a:ext cx="1325880" cy="429768"/>
           </a:xfrm>
           <a:prstGeom prst="rect">
             <a:avLst/>
@@ -9874,7 +9907,7 @@
         <p:spPr>
           <a:xfrm>
             <a:off x="411480" y="3337560"/>
-            <a:ext cx="2377440" cy="347472"/>
+            <a:ext cx="1234440" cy="347472"/>
           </a:xfrm>
           <a:prstGeom prst="rect">
             <a:avLst/>
@@ -9907,8 +9940,8 @@
         </p:nvSpPr>
         <p:spPr>
           <a:xfrm>
-            <a:off x="2926080" y="3300984"/>
-            <a:ext cx="3291840" cy="429768"/>
+            <a:off x="1737360" y="3300984"/>
+            <a:ext cx="1737360" cy="429768"/>
           </a:xfrm>
           <a:prstGeom prst="rect">
             <a:avLst/>
@@ -9950,8 +9983,8 @@
         </p:nvSpPr>
         <p:spPr>
           <a:xfrm>
-            <a:off x="2971800" y="3337560"/>
-            <a:ext cx="3200400" cy="347472"/>
+            <a:off x="1783080" y="3337560"/>
+            <a:ext cx="1645920" cy="347472"/>
           </a:xfrm>
           <a:prstGeom prst="rect">
             <a:avLst/>
@@ -9984,8 +10017,8 @@
         </p:nvSpPr>
         <p:spPr>
           <a:xfrm>
-            <a:off x="6400800" y="3300984"/>
-            <a:ext cx="2743200" cy="429768"/>
+            <a:off x="3520440" y="3300984"/>
+            <a:ext cx="1783080" cy="429768"/>
           </a:xfrm>
           <a:prstGeom prst="rect">
             <a:avLst/>
@@ -10027,8 +10060,8 @@
         </p:nvSpPr>
         <p:spPr>
           <a:xfrm>
-            <a:off x="6446520" y="3337560"/>
-            <a:ext cx="2651760" cy="347472"/>
+            <a:off x="3566160" y="3337560"/>
+            <a:ext cx="1691640" cy="347472"/>
           </a:xfrm>
           <a:prstGeom prst="rect">
             <a:avLst/>
@@ -10061,8 +10094,8 @@
         </p:nvSpPr>
         <p:spPr>
           <a:xfrm>
-            <a:off x="9326880" y="3300984"/>
-            <a:ext cx="2560320" cy="429768"/>
+            <a:off x="5349240" y="3300984"/>
+            <a:ext cx="1417320" cy="429768"/>
           </a:xfrm>
           <a:prstGeom prst="rect">
             <a:avLst/>
@@ -10104,8 +10137,8 @@
         </p:nvSpPr>
         <p:spPr>
           <a:xfrm>
-            <a:off x="9372600" y="3337560"/>
-            <a:ext cx="2468880" cy="347472"/>
+            <a:off x="5394960" y="3337560"/>
+            <a:ext cx="1325880" cy="347472"/>
           </a:xfrm>
           <a:prstGeom prst="rect">
             <a:avLst/>
@@ -10130,9 +10163,42 @@
           </a:p>
         </p:txBody>
       </p:sp>
+      <p:sp>
+        <p:nvSpPr>
+          <p:cNvPr id="45" name="TextBox 44"/>
+          <p:cNvSpPr txBox="1"/>
+          <p:nvPr/>
+        </p:nvSpPr>
+        <p:spPr>
+          <a:xfrm>
+            <a:off x="365760" y="3822191"/>
+            <a:ext cx="6400800" cy="274320"/>
+          </a:xfrm>
+          <a:prstGeom prst="rect">
+            <a:avLst/>
+          </a:prstGeom>
+          <a:noFill/>
+        </p:spPr>
+        <p:txBody>
+          <a:bodyPr wrap="none">
+            <a:spAutoFit/>
+          </a:bodyPr>
+          <a:lstStyle/>
+          <a:p>
+            <a:r>
+              <a:rPr sz="1200" i="1">
+                <a:solidFill>
+                  <a:srgbClr val="FF6B00"/>
+                </a:solidFill>
+              </a:rPr>
+              <a:t>Feb 2024 — the clearest drift case (static fell below the 0.70 alert line)</a:t>
+            </a:r>
+          </a:p>
+        </p:txBody>
+      </p:sp>
       <p:pic>
         <p:nvPicPr>
-          <p:cNvPr id="45" name="Picture 44" descr="fig_07_learning.png"/>
+          <p:cNvPr id="46" name="Picture 45" descr="fig_07_learning.png"/>
           <p:cNvPicPr>
             <a:picLocks noChangeAspect="1"/>
           </p:cNvPicPr>
@@ -10146,8 +10212,8 @@
         </p:blipFill>
         <p:spPr>
           <a:xfrm>
-            <a:off x="7406640" y="1481328"/>
-            <a:ext cx="4480560" cy="3840480"/>
+            <a:off x="6949440" y="1737360"/>
+            <a:ext cx="5074920" cy="3172968"/>
           </a:xfrm>
           <a:prstGeom prst="rect">
             <a:avLst/>
@@ -10156,14 +10222,14 @@
       </p:pic>
       <p:sp>
         <p:nvSpPr>
-          <p:cNvPr id="46" name="TextBox 45"/>
+          <p:cNvPr id="47" name="TextBox 46"/>
           <p:cNvSpPr txBox="1"/>
           <p:nvPr/>
         </p:nvSpPr>
         <p:spPr>
           <a:xfrm>
             <a:off x="365760" y="4617720"/>
-            <a:ext cx="6858000" cy="1920240"/>
+            <a:ext cx="6400800" cy="1920240"/>
           </a:xfrm>
           <a:prstGeom prst="rect">
             <a:avLst/>
